--- a/AI漫剧制作课程/PPT课件/模块08-海螺AI与Vidu.pptx
+++ b/AI漫剧制作课程/PPT课件/模块08-海螺AI与Vidu.pptx
@@ -6301,7 +6301,7 @@
               </a:defRPr>
             </a:pPr>
             <a:r>
-              <a:t>✓</a:t>
+              <a:t>◆</a:t>
             </a:r>
           </a:p>
         </p:txBody>
@@ -8418,7 +8418,7 @@
               </a:defRPr>
             </a:pPr>
             <a:r>
-              <a:t>📋  本节内容</a:t>
+              <a:t>§  本节内容</a:t>
             </a:r>
           </a:p>
         </p:txBody>
@@ -24607,7 +24607,7 @@
                         </a:defRPr>
                       </a:pPr>
                       <a:r>
-                        <a:t>❌</a:t>
+                        <a:t>◆</a:t>
                       </a:r>
                     </a:p>
                   </a:txBody>
@@ -24631,7 +24631,7 @@
                         </a:defRPr>
                       </a:pPr>
                       <a:r>
-                        <a:t>❌</a:t>
+                        <a:t>◆</a:t>
                       </a:r>
                     </a:p>
                   </a:txBody>
@@ -24655,7 +24655,7 @@
                         </a:defRPr>
                       </a:pPr>
                       <a:r>
-                        <a:t>❌</a:t>
+                        <a:t>◆</a:t>
                       </a:r>
                     </a:p>
                   </a:txBody>
@@ -24679,7 +24679,7 @@
                         </a:defRPr>
                       </a:pPr>
                       <a:r>
-                        <a:t>✅</a:t>
+                        <a:t>◆</a:t>
                       </a:r>
                     </a:p>
                   </a:txBody>
@@ -24729,7 +24729,7 @@
                         </a:defRPr>
                       </a:pPr>
                       <a:r>
-                        <a:t>❌</a:t>
+                        <a:t>◆</a:t>
                       </a:r>
                     </a:p>
                   </a:txBody>
@@ -24753,7 +24753,7 @@
                         </a:defRPr>
                       </a:pPr>
                       <a:r>
-                        <a:t>✅</a:t>
+                        <a:t>◆</a:t>
                       </a:r>
                     </a:p>
                   </a:txBody>
@@ -24777,7 +24777,7 @@
                         </a:defRPr>
                       </a:pPr>
                       <a:r>
-                        <a:t>❌</a:t>
+                        <a:t>◆</a:t>
                       </a:r>
                     </a:p>
                   </a:txBody>
@@ -24801,7 +24801,7 @@
                         </a:defRPr>
                       </a:pPr>
                       <a:r>
-                        <a:t>❌</a:t>
+                        <a:t>◆</a:t>
                       </a:r>
                     </a:p>
                   </a:txBody>
@@ -32809,7 +32809,7 @@
               </a:defRPr>
             </a:pPr>
             <a:r>
-              <a:t>🛠️  本模块实操任务</a:t>
+              <a:t>◆  本模块实操任务</a:t>
             </a:r>
           </a:p>
         </p:txBody>
